--- a/decks/maths-algebra/maths-algebra_ch3_substitution-one-step.pptx
+++ b/decks/maths-algebra/maths-algebra_ch3_substitution-one-step.pptx
@@ -121,47 +121,47 @@
   <p:extLst>
     <p:ext uri="{521415D9-36F7-43E2-AB2F-B90AF26B5E84}">
       <p14:sectionLst xmlns:p14="http://schemas.microsoft.com/office/powerpoint/2010/main">
-        <p14:section name="Opening" id="{ff9772f7-4879-ea2e-6515-9fce1316e79d}">
+        <p14:section name="Opening" id="{7abd8bd3-6115-40da-c24a-64755b0ecec6}">
           <p14:sldIdLst>
             <p14:sldId id="256"/>
           </p14:sldIdLst>
         </p14:section>
-        <p14:section name="Gate" id="{0052a5d7-beb0-9336-4f46-3a3aa6921142}">
+        <p14:section name="Gate" id="{588ba9ee-8221-6f0c-e480-8ae7001ee58e}">
           <p14:sldIdLst>
             <p14:sldId id="257"/>
             <p14:sldId id="258"/>
           </p14:sldIdLst>
         </p14:section>
-        <p14:section name="Pre-teach" id="{14c65739-6325-fb07-618d-8315f7902bd2}">
+        <p14:section name="Pre-teach" id="{ccc57581-6f1f-5863-764c-15d36208e202}">
           <p14:sldIdLst>
             <p14:sldId id="259"/>
           </p14:sldIdLst>
         </p14:section>
-        <p14:section name="Read-along" id="{091ba630-c3b4-ecf3-fdf5-907ca8b157f0}">
+        <p14:section name="Read-along" id="{5144b642-4864-78ab-031e-a69f2f97fdbb}">
           <p14:sldIdLst>
             <p14:sldId id="260"/>
             <p14:sldId id="261"/>
           </p14:sldIdLst>
         </p14:section>
-        <p14:section name="Teach" id="{d66cee74-34cd-bcd2-3140-332353a6ec1c}">
+        <p14:section name="Teach" id="{ed0cb5c9-3c5e-ba7d-8d13-69c65424e85c}">
           <p14:sldIdLst>
             <p14:sldId id="262"/>
             <p14:sldId id="263"/>
             <p14:sldId id="264"/>
           </p14:sldIdLst>
         </p14:section>
-        <p14:section name="Routes" id="{45568d0f-cc6b-7038-fbb3-07a4fc3ed05e}">
+        <p14:section name="Routes" id="{bf09f667-3d45-5af0-faae-399778c2aeea}">
           <p14:sldIdLst>
             <p14:sldId id="265"/>
             <p14:sldId id="266"/>
           </p14:sldIdLst>
         </p14:section>
-        <p14:section name="Close" id="{2fab93ff-a21d-2a8a-ed2b-fdf778daef62}">
+        <p14:section name="Close" id="{6df8ddaf-453e-00c2-2624-89fc14169f4e}">
           <p14:sldIdLst>
             <p14:sldId id="267"/>
           </p14:sldIdLst>
         </p14:section>
-        <p14:section name="Answers" id="{c98b7b04-12c5-dcce-4e0e-d15d7d9c25c5}">
+        <p14:section name="Answers" id="{761475f1-69ae-61d1-59cf-47e3452a09ab}">
           <p14:sldIdLst>
             <p14:sldId id="268"/>
             <p14:sldId id="269"/>
@@ -853,7 +853,7 @@
               <a:rPr lang="en-US" dirty="0"/>
               <a:t>Exit ticket — individual, silent, on a slip or mini-whiteboard. Recall before help: no notes, no lanes, no hints. Collect before pupils leave.
 Question: Which pair of expressions has the same value for every value of z?
-Answer: A   z + 7 and 7 + z. Adding in either order gives the same total, so z + 7 and 7 + z are always equal. The other pairs agree for only one value of z.
+Answer: D   z + 7 and 7 + z. Adding in either order gives the same total, so z + 7 and 7 + z are always equal. The other pairs agree for only one value of z.
 Source of this question: module 3 task ("Always equal?") from the manifest.
 Sort the slips: correct → ready to move on; incorrect → start next lesson in the pre-teach group, with the read-along and the Support lane. Same destination next time.</a:t>
             </a:r>
@@ -1126,7 +1126,7 @@
             <a:r>
               <a:rPr lang="en-US" dirty="0"/>
               <a:t>Answers — exit ticket: Exit ticket. Reveal the answer; pupils mark their own work in a different colour, then read the "why" together. Same destination for every lane, so one answer serves the whole class.
-Answer: A   z + 7 and 7 + z
+Answer: D   z + 7 and 7 + z
 Why: Adding in either order gives the same total, so z + 7 and 7 + z are always equal. The other pairs agree for only one value of z.
 Ask a Support pupil to explain one step, and a Stretch pupil to share their extension.</a:t>
             </a:r>
@@ -1218,7 +1218,7 @@
               <a:rPr lang="en-US" dirty="0"/>
               <a:t>Do now — retrieval. Silent, no notes, no help: recall comes before any support. Give about four minutes.
 1. If x = 8, work out 7x.  →  56
-2. If g = 3, what does 4g mean?  →  C   4 × 3
+2. If g = 3, what does 4g mean?  →  D   4 × 3
 3. If d = 40, work out d ÷ 8.  →  5
 Circulate: who gets 3/3 (Stretch route), 2/3 (Core), 0–1 (Support)? Use this to route pupils later in the lesson.</a:t>
             </a:r>
@@ -1310,7 +1310,7 @@
               <a:rPr lang="en-US" dirty="0"/>
               <a:t>Answers — pupils mark their own in a different colour, then hands up for 3/3, 2/3, 1/3.
 1. 56. 7x means 7 × x. Swap x for 8: 7 × 8 = 56.
-2. C   4 × 3. 4g means 4 × g. When g is 3, that is 4 × 3 = 12.
+2. D   4 × 3. 4g means 4 × g. When g is 3, that is 4 × 3 = 12.
 3. 5. Swap d for 40: 40 ÷ 8 = 5.
 Say the route each score points to: 3/3 Stretch, 2/3 Core, 0–1 Support. Pupils may choose to move up.</a:t>
             </a:r>
@@ -5880,7 +5880,7 @@
                 <a:ea typeface="Calibri" pitchFamily="34" charset="-122"/>
                 <a:cs typeface="Calibri" pitchFamily="34" charset="-120"/>
               </a:rPr>
-              <a:t>z + 7 and 7 + z</a:t>
+              <a:t>z/9 and 9z</a:t>
             </a:r>
             <a:endParaRPr lang="en-US" sz="2400" dirty="0"/>
           </a:p>
@@ -5954,7 +5954,7 @@
                 <a:ea typeface="Calibri" pitchFamily="34" charset="-122"/>
                 <a:cs typeface="Calibri" pitchFamily="34" charset="-120"/>
               </a:rPr>
-              <a:t>z/9 and 9z</a:t>
+              <a:t>z × 2 and z + 2</a:t>
             </a:r>
             <a:endParaRPr lang="en-US" sz="2400" dirty="0"/>
           </a:p>
@@ -5991,7 +5991,7 @@
                 <a:ea typeface="Calibri" pitchFamily="34" charset="-122"/>
                 <a:cs typeface="Calibri" pitchFamily="34" charset="-120"/>
               </a:rPr>
-              <a:t>z × 2 and z + 2</a:t>
+              <a:t>z + 7 and 7 + z</a:t>
             </a:r>
             <a:endParaRPr lang="en-US" sz="2400" dirty="0"/>
           </a:p>
@@ -7314,7 +7314,7 @@
                 <a:ea typeface="Cambria" pitchFamily="34" charset="-122"/>
                 <a:cs typeface="Cambria" pitchFamily="34" charset="-120"/>
               </a:rPr>
-              <a:t>A   z + 7 and 7 + z</a:t>
+              <a:t>D   z + 7 and 7 + z</a:t>
             </a:r>
             <a:endParaRPr lang="en-US" sz="1800" dirty="0"/>
           </a:p>
@@ -8046,7 +8046,7 @@
                 <a:ea typeface="Calibri" pitchFamily="34" charset="-122"/>
                 <a:cs typeface="Calibri" pitchFamily="34" charset="-120"/>
               </a:rPr>
-              <a:t>4 + 3</a:t>
+              <a:t>43</a:t>
             </a:r>
             <a:endParaRPr lang="en-US" sz="2400" dirty="0"/>
           </a:p>
@@ -8083,7 +8083,7 @@
                 <a:ea typeface="Calibri" pitchFamily="34" charset="-122"/>
                 <a:cs typeface="Calibri" pitchFamily="34" charset="-120"/>
               </a:rPr>
-              <a:t>43</a:t>
+              <a:t>4 + 3</a:t>
             </a:r>
             <a:endParaRPr lang="en-US" sz="2400" dirty="0"/>
           </a:p>
@@ -8120,7 +8120,7 @@
                 <a:ea typeface="Calibri" pitchFamily="34" charset="-122"/>
                 <a:cs typeface="Calibri" pitchFamily="34" charset="-120"/>
               </a:rPr>
-              <a:t>4 × 3</a:t>
+              <a:t>4 − 3</a:t>
             </a:r>
             <a:endParaRPr lang="en-US" sz="2400" dirty="0"/>
           </a:p>
@@ -8157,7 +8157,7 @@
                 <a:ea typeface="Calibri" pitchFamily="34" charset="-122"/>
                 <a:cs typeface="Calibri" pitchFamily="34" charset="-120"/>
               </a:rPr>
-              <a:t>4 − 3</a:t>
+              <a:t>4 × 3</a:t>
             </a:r>
             <a:endParaRPr lang="en-US" sz="2400" dirty="0"/>
           </a:p>
@@ -9006,7 +9006,7 @@
                 <a:ea typeface="Calibri" pitchFamily="34" charset="-122"/>
                 <a:cs typeface="Calibri" pitchFamily="34" charset="-120"/>
               </a:rPr>
-              <a:t>C   4 × 3</a:t>
+              <a:t>D   4 × 3</a:t>
             </a:r>
             <a:endParaRPr lang="en-US" sz="2200" dirty="0"/>
           </a:p>

--- a/decks/maths-algebra/maths-algebra_ch3_substitution-one-step.pptx
+++ b/decks/maths-algebra/maths-algebra_ch3_substitution-one-step.pptx
@@ -121,47 +121,47 @@
   <p:extLst>
     <p:ext uri="{521415D9-36F7-43E2-AB2F-B90AF26B5E84}">
       <p14:sectionLst xmlns:p14="http://schemas.microsoft.com/office/powerpoint/2010/main">
-        <p14:section name="Opening" id="{7abd8bd3-6115-40da-c24a-64755b0ecec6}">
+        <p14:section name="Opening" id="{dd025855-9ef6-9583-b419-d1c115deb721}">
           <p14:sldIdLst>
             <p14:sldId id="256"/>
           </p14:sldIdLst>
         </p14:section>
-        <p14:section name="Gate" id="{588ba9ee-8221-6f0c-e480-8ae7001ee58e}">
+        <p14:section name="Gate" id="{e1a89373-c842-3ed4-d976-29984099a8c2}">
           <p14:sldIdLst>
             <p14:sldId id="257"/>
             <p14:sldId id="258"/>
           </p14:sldIdLst>
         </p14:section>
-        <p14:section name="Pre-teach" id="{ccc57581-6f1f-5863-764c-15d36208e202}">
+        <p14:section name="Pre-teach" id="{ffbc55ee-22a1-a186-38f3-d641ee8afd59}">
           <p14:sldIdLst>
             <p14:sldId id="259"/>
           </p14:sldIdLst>
         </p14:section>
-        <p14:section name="Read-along" id="{5144b642-4864-78ab-031e-a69f2f97fdbb}">
+        <p14:section name="Read-along" id="{adeb6fc4-d5cc-e535-dc02-ca694a2b3c31}">
           <p14:sldIdLst>
             <p14:sldId id="260"/>
             <p14:sldId id="261"/>
           </p14:sldIdLst>
         </p14:section>
-        <p14:section name="Teach" id="{ed0cb5c9-3c5e-ba7d-8d13-69c65424e85c}">
+        <p14:section name="Teach" id="{198a28d5-c1f7-4297-40fc-195378be120f}">
           <p14:sldIdLst>
             <p14:sldId id="262"/>
             <p14:sldId id="263"/>
             <p14:sldId id="264"/>
           </p14:sldIdLst>
         </p14:section>
-        <p14:section name="Routes" id="{bf09f667-3d45-5af0-faae-399778c2aeea}">
+        <p14:section name="Routes" id="{8dc44924-e0f1-a4a7-eec5-c45ec6ce3715}">
           <p14:sldIdLst>
             <p14:sldId id="265"/>
             <p14:sldId id="266"/>
           </p14:sldIdLst>
         </p14:section>
-        <p14:section name="Close" id="{6df8ddaf-453e-00c2-2624-89fc14169f4e}">
+        <p14:section name="Close" id="{2f5e259f-e522-0199-2495-f2bcb9df8a19}">
           <p14:sldIdLst>
             <p14:sldId id="267"/>
           </p14:sldIdLst>
         </p14:section>
-        <p14:section name="Answers" id="{761475f1-69ae-61d1-59cf-47e3452a09ab}">
+        <p14:section name="Answers" id="{d547fcc6-e990-a10d-d4ed-c7ac1fefd33a}">
           <p14:sldIdLst>
             <p14:sldId id="268"/>
             <p14:sldId id="269"/>
